--- a/HW_1_programming_set/HW_1_programming/HW1.pptx
+++ b/HW_1_programming_set/HW_1_programming/HW1.pptx
@@ -155,7 +155,7 @@
 <file path=ppt/revisionInfo.xml><?xml version="1.0" encoding="utf-8"?>
 <p1510:revInfo xmlns:a="http://schemas.openxmlformats.org/drawingml/2006/main" xmlns:r="http://schemas.openxmlformats.org/officeDocument/2006/relationships" xmlns:p1510="http://schemas.microsoft.com/office/powerpoint/2015/10/main">
   <p1510:revLst>
-    <p1510:client id="{7D39DA76-601B-4CB1-9E91-35C9DD99AE0D}" v="2" dt="2026-09-14T05:01:29.673"/>
+    <p1510:client id="{7D39DA76-601B-4CB1-9E91-35C9DD99AE0D}" v="5" dt="2026-09-14T14:55:06.322"/>
   </p1510:revLst>
 </p1510:revInfo>
 </file>
@@ -165,7 +165,7 @@
   <pc:docChgLst>
     <pc:chgData name="Chao, Wei-Lun" userId="d629317c-62de-44d6-9e2c-4d96c0d2596e" providerId="ADAL" clId="{E047DB95-266B-4A8F-9553-BDF1C75A45B8}"/>
     <pc:docChg chg="undo custSel addSld delSld modSld">
-      <pc:chgData name="Chao, Wei-Lun" userId="d629317c-62de-44d6-9e2c-4d96c0d2596e" providerId="ADAL" clId="{E047DB95-266B-4A8F-9553-BDF1C75A45B8}" dt="2026-09-14T05:06:52.827" v="61" actId="20577"/>
+      <pc:chgData name="Chao, Wei-Lun" userId="d629317c-62de-44d6-9e2c-4d96c0d2596e" providerId="ADAL" clId="{E047DB95-266B-4A8F-9553-BDF1C75A45B8}" dt="2026-09-14T14:55:06.322" v="64"/>
       <pc:docMkLst>
         <pc:docMk/>
       </pc:docMkLst>
@@ -196,6 +196,37 @@
             <pc:docMk/>
             <pc:sldMk cId="3024788253" sldId="6111"/>
             <ac:spMk id="3" creationId="{85806E11-FAB8-9015-415A-3C9DCD1AC8B4}"/>
+          </ac:spMkLst>
+        </pc:spChg>
+      </pc:sldChg>
+      <pc:sldChg chg="modSp">
+        <pc:chgData name="Chao, Wei-Lun" userId="d629317c-62de-44d6-9e2c-4d96c0d2596e" providerId="ADAL" clId="{E047DB95-266B-4A8F-9553-BDF1C75A45B8}" dt="2026-09-14T14:55:06.322" v="64"/>
+        <pc:sldMkLst>
+          <pc:docMk/>
+          <pc:sldMk cId="4155785197" sldId="6171"/>
+        </pc:sldMkLst>
+        <pc:spChg chg="mod">
+          <ac:chgData name="Chao, Wei-Lun" userId="d629317c-62de-44d6-9e2c-4d96c0d2596e" providerId="ADAL" clId="{E047DB95-266B-4A8F-9553-BDF1C75A45B8}" dt="2026-09-14T14:55:04.706" v="63"/>
+          <ac:spMkLst>
+            <pc:docMk/>
+            <pc:sldMk cId="4155785197" sldId="6171"/>
+            <ac:spMk id="17" creationId="{E69EF51E-102F-0254-C376-12B356A88689}"/>
+          </ac:spMkLst>
+        </pc:spChg>
+        <pc:spChg chg="mod">
+          <ac:chgData name="Chao, Wei-Lun" userId="d629317c-62de-44d6-9e2c-4d96c0d2596e" providerId="ADAL" clId="{E047DB95-266B-4A8F-9553-BDF1C75A45B8}" dt="2026-09-14T14:55:06.322" v="64"/>
+          <ac:spMkLst>
+            <pc:docMk/>
+            <pc:sldMk cId="4155785197" sldId="6171"/>
+            <ac:spMk id="18" creationId="{92B7FB78-8EC8-0B00-C666-56ECD3E30AB4}"/>
+          </ac:spMkLst>
+        </pc:spChg>
+        <pc:spChg chg="mod">
+          <ac:chgData name="Chao, Wei-Lun" userId="d629317c-62de-44d6-9e2c-4d96c0d2596e" providerId="ADAL" clId="{E047DB95-266B-4A8F-9553-BDF1C75A45B8}" dt="2026-09-14T14:55:03.163" v="62"/>
+          <ac:spMkLst>
+            <pc:docMk/>
+            <pc:sldMk cId="4155785197" sldId="6171"/>
+            <ac:spMk id="58" creationId="{A04A0ADA-777E-08E6-991E-AD124B3BF5FC}"/>
           </ac:spMkLst>
         </pc:spChg>
       </pc:sldChg>
@@ -9242,8 +9273,8 @@
             <a:chExt cx="5847116" cy="1555437"/>
           </a:xfrm>
         </p:grpSpPr>
-        <mc:AlternateContent xmlns:mc="http://schemas.openxmlformats.org/markup-compatibility/2006" xmlns:a14="http://schemas.microsoft.com/office/drawing/2010/main">
-          <mc:Choice Requires="a14">
+        <mc:AlternateContent xmlns:mc="http://schemas.openxmlformats.org/markup-compatibility/2006">
+          <mc:Choice xmlns:a14="http://schemas.microsoft.com/office/drawing/2010/main" Requires="a14">
             <p:sp>
               <p:nvSpPr>
                 <p:cNvPr id="58" name="TextBox 57">
@@ -9364,24 +9395,12 @@
                             </m:r>
                           </m:e>
                         </m:d>
-                        <m:acc>
-                          <m:accPr>
-                            <m:chr m:val="̃"/>
-                            <m:ctrlPr>
-                              <a:rPr lang="en-US" i="1">
-                                <a:latin typeface="Cambria Math" panose="02040503050406030204" pitchFamily="18" charset="0"/>
-                              </a:rPr>
-                            </m:ctrlPr>
-                          </m:accPr>
-                          <m:e>
-                            <m:r>
-                              <a:rPr lang="en-US" i="1">
-                                <a:latin typeface="Cambria Math" panose="02040503050406030204" pitchFamily="18" charset="0"/>
-                              </a:rPr>
-                              <m:t>𝑌</m:t>
-                            </m:r>
-                          </m:e>
-                        </m:acc>
+                        <m:r>
+                          <a:rPr lang="en-US" i="1">
+                            <a:latin typeface="Cambria Math" panose="02040503050406030204" pitchFamily="18" charset="0"/>
+                          </a:rPr>
+                          <m:t>𝑌</m:t>
+                        </m:r>
                         <m:r>
                           <a:rPr lang="en-US" i="1">
                             <a:latin typeface="Cambria Math" panose="02040503050406030204" pitchFamily="18" charset="0"/>
@@ -9402,7 +9421,7 @@
               </p:txBody>
             </p:sp>
           </mc:Choice>
-          <mc:Fallback xmlns="">
+          <mc:Fallback>
             <p:sp>
               <p:nvSpPr>
                 <p:cNvPr id="58" name="TextBox 57">
@@ -9428,7 +9447,7 @@
                 <a:blipFill>
                   <a:blip r:embed="rId3"/>
                   <a:stretch>
-                    <a:fillRect t="-4839"/>
+                    <a:fillRect/>
                   </a:stretch>
                 </a:blipFill>
               </p:spPr>
@@ -10373,8 +10392,8 @@
           </a:p>
         </p:txBody>
       </p:sp>
-      <mc:AlternateContent xmlns:mc="http://schemas.openxmlformats.org/markup-compatibility/2006" xmlns:a14="http://schemas.microsoft.com/office/drawing/2010/main">
-        <mc:Choice Requires="a14">
+      <mc:AlternateContent xmlns:mc="http://schemas.openxmlformats.org/markup-compatibility/2006">
+        <mc:Choice xmlns:a14="http://schemas.microsoft.com/office/drawing/2010/main" Requires="a14">
           <p:sp>
             <p:nvSpPr>
               <p:cNvPr id="17" name="TextBox 16">
@@ -10495,24 +10514,12 @@
                           </m:r>
                         </m:e>
                       </m:d>
-                      <m:acc>
-                        <m:accPr>
-                          <m:chr m:val="̃"/>
-                          <m:ctrlPr>
-                            <a:rPr lang="en-US" i="1">
-                              <a:latin typeface="Cambria Math" panose="02040503050406030204" pitchFamily="18" charset="0"/>
-                            </a:rPr>
-                          </m:ctrlPr>
-                        </m:accPr>
-                        <m:e>
-                          <m:r>
-                            <a:rPr lang="en-US" i="1">
-                              <a:latin typeface="Cambria Math" panose="02040503050406030204" pitchFamily="18" charset="0"/>
-                            </a:rPr>
-                            <m:t>𝑌</m:t>
-                          </m:r>
-                        </m:e>
-                      </m:acc>
+                      <m:r>
+                        <a:rPr lang="en-US" i="1">
+                          <a:latin typeface="Cambria Math" panose="02040503050406030204" pitchFamily="18" charset="0"/>
+                        </a:rPr>
+                        <m:t>𝑌</m:t>
+                      </m:r>
                       <m:r>
                         <a:rPr lang="en-US" i="1">
                           <a:latin typeface="Cambria Math" panose="02040503050406030204" pitchFamily="18" charset="0"/>
@@ -10533,7 +10540,7 @@
             </p:txBody>
           </p:sp>
         </mc:Choice>
-        <mc:Fallback xmlns="">
+        <mc:Fallback>
           <p:sp>
             <p:nvSpPr>
               <p:cNvPr id="17" name="TextBox 16">
@@ -10559,7 +10566,7 @@
               <a:blipFill>
                 <a:blip r:embed="rId9"/>
                 <a:stretch>
-                  <a:fillRect t="-4918"/>
+                  <a:fillRect/>
                 </a:stretch>
               </a:blipFill>
             </p:spPr>
@@ -10578,8 +10585,8 @@
           </p:sp>
         </mc:Fallback>
       </mc:AlternateContent>
-      <mc:AlternateContent xmlns:mc="http://schemas.openxmlformats.org/markup-compatibility/2006" xmlns:a14="http://schemas.microsoft.com/office/drawing/2010/main">
-        <mc:Choice Requires="a14">
+      <mc:AlternateContent xmlns:mc="http://schemas.openxmlformats.org/markup-compatibility/2006">
+        <mc:Choice xmlns:a14="http://schemas.microsoft.com/office/drawing/2010/main" Requires="a14">
           <p:sp>
             <p:nvSpPr>
               <p:cNvPr id="18" name="TextBox 17">
@@ -10718,24 +10725,12 @@
                           </m:r>
                         </m:e>
                       </m:d>
-                      <m:acc>
-                        <m:accPr>
-                          <m:chr m:val="̃"/>
-                          <m:ctrlPr>
-                            <a:rPr lang="en-US" i="1">
-                              <a:latin typeface="Cambria Math" panose="02040503050406030204" pitchFamily="18" charset="0"/>
-                            </a:rPr>
-                          </m:ctrlPr>
-                        </m:accPr>
-                        <m:e>
-                          <m:r>
-                            <a:rPr lang="en-US" i="1">
-                              <a:latin typeface="Cambria Math" panose="02040503050406030204" pitchFamily="18" charset="0"/>
-                            </a:rPr>
-                            <m:t>𝑌</m:t>
-                          </m:r>
-                        </m:e>
-                      </m:acc>
+                      <m:r>
+                        <a:rPr lang="en-US" i="1">
+                          <a:latin typeface="Cambria Math" panose="02040503050406030204" pitchFamily="18" charset="0"/>
+                        </a:rPr>
+                        <m:t>𝑌</m:t>
+                      </m:r>
                       <m:r>
                         <a:rPr lang="en-US" i="1">
                           <a:latin typeface="Cambria Math" panose="02040503050406030204" pitchFamily="18" charset="0"/>
@@ -10756,7 +10751,7 @@
             </p:txBody>
           </p:sp>
         </mc:Choice>
-        <mc:Fallback xmlns="">
+        <mc:Fallback>
           <p:sp>
             <p:nvSpPr>
               <p:cNvPr id="18" name="TextBox 17">
@@ -10782,7 +10777,7 @@
               <a:blipFill>
                 <a:blip r:embed="rId10"/>
                 <a:stretch>
-                  <a:fillRect t="-4918"/>
+                  <a:fillRect/>
                 </a:stretch>
               </a:blipFill>
             </p:spPr>

--- a/HW_1_programming_set/HW_1_programming/HW1.pptx
+++ b/HW_1_programming_set/HW_1_programming/HW1.pptx
@@ -155,7 +155,7 @@
 <file path=ppt/revisionInfo.xml><?xml version="1.0" encoding="utf-8"?>
 <p1510:revInfo xmlns:a="http://schemas.openxmlformats.org/drawingml/2006/main" xmlns:r="http://schemas.openxmlformats.org/officeDocument/2006/relationships" xmlns:p1510="http://schemas.microsoft.com/office/powerpoint/2015/10/main">
   <p1510:revLst>
-    <p1510:client id="{7D39DA76-601B-4CB1-9E91-35C9DD99AE0D}" v="5" dt="2026-09-14T14:55:06.322"/>
+    <p1510:client id="{7D39DA76-601B-4CB1-9E91-35C9DD99AE0D}" v="11" dt="2026-09-16T13:02:07.261"/>
   </p1510:revLst>
 </p1510:revInfo>
 </file>
@@ -165,7 +165,7 @@
   <pc:docChgLst>
     <pc:chgData name="Chao, Wei-Lun" userId="d629317c-62de-44d6-9e2c-4d96c0d2596e" providerId="ADAL" clId="{E047DB95-266B-4A8F-9553-BDF1C75A45B8}"/>
     <pc:docChg chg="undo custSel addSld delSld modSld">
-      <pc:chgData name="Chao, Wei-Lun" userId="d629317c-62de-44d6-9e2c-4d96c0d2596e" providerId="ADAL" clId="{E047DB95-266B-4A8F-9553-BDF1C75A45B8}" dt="2026-09-14T14:55:06.322" v="64"/>
+      <pc:chgData name="Chao, Wei-Lun" userId="d629317c-62de-44d6-9e2c-4d96c0d2596e" providerId="ADAL" clId="{E047DB95-266B-4A8F-9553-BDF1C75A45B8}" dt="2026-09-16T13:02:07.261" v="70"/>
       <pc:docMkLst>
         <pc:docMk/>
       </pc:docMkLst>
@@ -200,13 +200,13 @@
         </pc:spChg>
       </pc:sldChg>
       <pc:sldChg chg="modSp">
-        <pc:chgData name="Chao, Wei-Lun" userId="d629317c-62de-44d6-9e2c-4d96c0d2596e" providerId="ADAL" clId="{E047DB95-266B-4A8F-9553-BDF1C75A45B8}" dt="2026-09-14T14:55:06.322" v="64"/>
+        <pc:chgData name="Chao, Wei-Lun" userId="d629317c-62de-44d6-9e2c-4d96c0d2596e" providerId="ADAL" clId="{E047DB95-266B-4A8F-9553-BDF1C75A45B8}" dt="2026-09-16T13:02:07.261" v="70"/>
         <pc:sldMkLst>
           <pc:docMk/>
           <pc:sldMk cId="4155785197" sldId="6171"/>
         </pc:sldMkLst>
         <pc:spChg chg="mod">
-          <ac:chgData name="Chao, Wei-Lun" userId="d629317c-62de-44d6-9e2c-4d96c0d2596e" providerId="ADAL" clId="{E047DB95-266B-4A8F-9553-BDF1C75A45B8}" dt="2026-09-14T14:55:04.706" v="63"/>
+          <ac:chgData name="Chao, Wei-Lun" userId="d629317c-62de-44d6-9e2c-4d96c0d2596e" providerId="ADAL" clId="{E047DB95-266B-4A8F-9553-BDF1C75A45B8}" dt="2026-09-16T13:02:04.419" v="68"/>
           <ac:spMkLst>
             <pc:docMk/>
             <pc:sldMk cId="4155785197" sldId="6171"/>
@@ -214,7 +214,7 @@
           </ac:spMkLst>
         </pc:spChg>
         <pc:spChg chg="mod">
-          <ac:chgData name="Chao, Wei-Lun" userId="d629317c-62de-44d6-9e2c-4d96c0d2596e" providerId="ADAL" clId="{E047DB95-266B-4A8F-9553-BDF1C75A45B8}" dt="2026-09-14T14:55:06.322" v="64"/>
+          <ac:chgData name="Chao, Wei-Lun" userId="d629317c-62de-44d6-9e2c-4d96c0d2596e" providerId="ADAL" clId="{E047DB95-266B-4A8F-9553-BDF1C75A45B8}" dt="2026-09-16T13:02:07.261" v="70"/>
           <ac:spMkLst>
             <pc:docMk/>
             <pc:sldMk cId="4155785197" sldId="6171"/>
@@ -222,69 +222,13 @@
           </ac:spMkLst>
         </pc:spChg>
         <pc:spChg chg="mod">
-          <ac:chgData name="Chao, Wei-Lun" userId="d629317c-62de-44d6-9e2c-4d96c0d2596e" providerId="ADAL" clId="{E047DB95-266B-4A8F-9553-BDF1C75A45B8}" dt="2026-09-14T14:55:03.163" v="62"/>
+          <ac:chgData name="Chao, Wei-Lun" userId="d629317c-62de-44d6-9e2c-4d96c0d2596e" providerId="ADAL" clId="{E047DB95-266B-4A8F-9553-BDF1C75A45B8}" dt="2026-09-16T13:02:02.090" v="66"/>
           <ac:spMkLst>
             <pc:docMk/>
             <pc:sldMk cId="4155785197" sldId="6171"/>
             <ac:spMk id="58" creationId="{A04A0ADA-777E-08E6-991E-AD124B3BF5FC}"/>
           </ac:spMkLst>
         </pc:spChg>
-      </pc:sldChg>
-      <pc:sldChg chg="add del">
-        <pc:chgData name="Chao, Wei-Lun" userId="d629317c-62de-44d6-9e2c-4d96c0d2596e" providerId="ADAL" clId="{E047DB95-266B-4A8F-9553-BDF1C75A45B8}" dt="2026-09-14T05:01:29.660" v="59"/>
-        <pc:sldMkLst>
-          <pc:docMk/>
-          <pc:sldMk cId="1469642181" sldId="6318"/>
-        </pc:sldMkLst>
-      </pc:sldChg>
-      <pc:sldChg chg="add del">
-        <pc:chgData name="Chao, Wei-Lun" userId="d629317c-62de-44d6-9e2c-4d96c0d2596e" providerId="ADAL" clId="{E047DB95-266B-4A8F-9553-BDF1C75A45B8}" dt="2026-09-14T05:01:29.660" v="59"/>
-        <pc:sldMkLst>
-          <pc:docMk/>
-          <pc:sldMk cId="2697982602" sldId="6319"/>
-        </pc:sldMkLst>
-      </pc:sldChg>
-      <pc:sldChg chg="add del">
-        <pc:chgData name="Chao, Wei-Lun" userId="d629317c-62de-44d6-9e2c-4d96c0d2596e" providerId="ADAL" clId="{E047DB95-266B-4A8F-9553-BDF1C75A45B8}" dt="2026-09-14T05:01:29.660" v="59"/>
-        <pc:sldMkLst>
-          <pc:docMk/>
-          <pc:sldMk cId="1867137025" sldId="6320"/>
-        </pc:sldMkLst>
-      </pc:sldChg>
-      <pc:sldChg chg="add del">
-        <pc:chgData name="Chao, Wei-Lun" userId="d629317c-62de-44d6-9e2c-4d96c0d2596e" providerId="ADAL" clId="{E047DB95-266B-4A8F-9553-BDF1C75A45B8}" dt="2026-09-14T05:01:29.660" v="59"/>
-        <pc:sldMkLst>
-          <pc:docMk/>
-          <pc:sldMk cId="1797968164" sldId="6321"/>
-        </pc:sldMkLst>
-      </pc:sldChg>
-      <pc:sldChg chg="add del">
-        <pc:chgData name="Chao, Wei-Lun" userId="d629317c-62de-44d6-9e2c-4d96c0d2596e" providerId="ADAL" clId="{E047DB95-266B-4A8F-9553-BDF1C75A45B8}" dt="2026-09-14T05:01:29.660" v="59"/>
-        <pc:sldMkLst>
-          <pc:docMk/>
-          <pc:sldMk cId="2018851401" sldId="6322"/>
-        </pc:sldMkLst>
-      </pc:sldChg>
-      <pc:sldChg chg="add del">
-        <pc:chgData name="Chao, Wei-Lun" userId="d629317c-62de-44d6-9e2c-4d96c0d2596e" providerId="ADAL" clId="{E047DB95-266B-4A8F-9553-BDF1C75A45B8}" dt="2026-09-14T05:01:29.660" v="59"/>
-        <pc:sldMkLst>
-          <pc:docMk/>
-          <pc:sldMk cId="4225384186" sldId="6323"/>
-        </pc:sldMkLst>
-      </pc:sldChg>
-      <pc:sldChg chg="add del">
-        <pc:chgData name="Chao, Wei-Lun" userId="d629317c-62de-44d6-9e2c-4d96c0d2596e" providerId="ADAL" clId="{E047DB95-266B-4A8F-9553-BDF1C75A45B8}" dt="2026-09-14T05:01:29.660" v="59"/>
-        <pc:sldMkLst>
-          <pc:docMk/>
-          <pc:sldMk cId="1845250470" sldId="6324"/>
-        </pc:sldMkLst>
-      </pc:sldChg>
-      <pc:sldChg chg="add del">
-        <pc:chgData name="Chao, Wei-Lun" userId="d629317c-62de-44d6-9e2c-4d96c0d2596e" providerId="ADAL" clId="{E047DB95-266B-4A8F-9553-BDF1C75A45B8}" dt="2026-09-14T05:01:29.660" v="59"/>
-        <pc:sldMkLst>
-          <pc:docMk/>
-          <pc:sldMk cId="933791959" sldId="6325"/>
-        </pc:sldMkLst>
       </pc:sldChg>
     </pc:docChg>
   </pc:docChgLst>
@@ -385,7 +329,7 @@
           <a:p>
             <a:fld id="{F0C8AC04-A67D-B24C-8E12-8FB56FC05672}" type="datetimeFigureOut">
               <a:rPr lang="en-US" smtClean="0"/>
-              <a:t>9/14/2026</a:t>
+              <a:t>9/16/2026</a:t>
             </a:fld>
             <a:endParaRPr lang="en-US"/>
           </a:p>
@@ -562,7 +506,7 @@
           <a:p>
             <a:fld id="{2DE3F71F-EE20-0840-B448-C2CC2398DE46}" type="datetimeFigureOut">
               <a:rPr lang="en-US" smtClean="0"/>
-              <a:t>9/14/2026</a:t>
+              <a:t>9/16/2026</a:t>
             </a:fld>
             <a:endParaRPr lang="en-US"/>
           </a:p>
@@ -9395,12 +9339,24 @@
                             </m:r>
                           </m:e>
                         </m:d>
-                        <m:r>
-                          <a:rPr lang="en-US" i="1">
-                            <a:latin typeface="Cambria Math" panose="02040503050406030204" pitchFamily="18" charset="0"/>
-                          </a:rPr>
-                          <m:t>𝑌</m:t>
-                        </m:r>
+                        <m:acc>
+                          <m:accPr>
+                            <m:chr m:val="̃"/>
+                            <m:ctrlPr>
+                              <a:rPr lang="en-US" i="1">
+                                <a:latin typeface="Cambria Math" panose="02040503050406030204" pitchFamily="18" charset="0"/>
+                              </a:rPr>
+                            </m:ctrlPr>
+                          </m:accPr>
+                          <m:e>
+                            <m:r>
+                              <a:rPr lang="en-US" i="1">
+                                <a:latin typeface="Cambria Math" panose="02040503050406030204" pitchFamily="18" charset="0"/>
+                              </a:rPr>
+                              <m:t>𝑌</m:t>
+                            </m:r>
+                          </m:e>
+                        </m:acc>
                         <m:r>
                           <a:rPr lang="en-US" i="1">
                             <a:latin typeface="Cambria Math" panose="02040503050406030204" pitchFamily="18" charset="0"/>
@@ -9447,7 +9403,7 @@
                 <a:blipFill>
                   <a:blip r:embed="rId3"/>
                   <a:stretch>
-                    <a:fillRect/>
+                    <a:fillRect t="-4839"/>
                   </a:stretch>
                 </a:blipFill>
               </p:spPr>
@@ -10514,12 +10470,24 @@
                           </m:r>
                         </m:e>
                       </m:d>
-                      <m:r>
-                        <a:rPr lang="en-US" i="1">
-                          <a:latin typeface="Cambria Math" panose="02040503050406030204" pitchFamily="18" charset="0"/>
-                        </a:rPr>
-                        <m:t>𝑌</m:t>
-                      </m:r>
+                      <m:acc>
+                        <m:accPr>
+                          <m:chr m:val="̃"/>
+                          <m:ctrlPr>
+                            <a:rPr lang="en-US" i="1">
+                              <a:latin typeface="Cambria Math" panose="02040503050406030204" pitchFamily="18" charset="0"/>
+                            </a:rPr>
+                          </m:ctrlPr>
+                        </m:accPr>
+                        <m:e>
+                          <m:r>
+                            <a:rPr lang="en-US" i="1">
+                              <a:latin typeface="Cambria Math" panose="02040503050406030204" pitchFamily="18" charset="0"/>
+                            </a:rPr>
+                            <m:t>𝑌</m:t>
+                          </m:r>
+                        </m:e>
+                      </m:acc>
                       <m:r>
                         <a:rPr lang="en-US" i="1">
                           <a:latin typeface="Cambria Math" panose="02040503050406030204" pitchFamily="18" charset="0"/>
@@ -10566,7 +10534,7 @@
               <a:blipFill>
                 <a:blip r:embed="rId9"/>
                 <a:stretch>
-                  <a:fillRect/>
+                  <a:fillRect t="-4918"/>
                 </a:stretch>
               </a:blipFill>
             </p:spPr>
@@ -10725,12 +10693,24 @@
                           </m:r>
                         </m:e>
                       </m:d>
-                      <m:r>
-                        <a:rPr lang="en-US" i="1">
-                          <a:latin typeface="Cambria Math" panose="02040503050406030204" pitchFamily="18" charset="0"/>
-                        </a:rPr>
-                        <m:t>𝑌</m:t>
-                      </m:r>
+                      <m:acc>
+                        <m:accPr>
+                          <m:chr m:val="̃"/>
+                          <m:ctrlPr>
+                            <a:rPr lang="en-US" i="1">
+                              <a:latin typeface="Cambria Math" panose="02040503050406030204" pitchFamily="18" charset="0"/>
+                            </a:rPr>
+                          </m:ctrlPr>
+                        </m:accPr>
+                        <m:e>
+                          <m:r>
+                            <a:rPr lang="en-US" i="1">
+                              <a:latin typeface="Cambria Math" panose="02040503050406030204" pitchFamily="18" charset="0"/>
+                            </a:rPr>
+                            <m:t>𝑌</m:t>
+                          </m:r>
+                        </m:e>
+                      </m:acc>
                       <m:r>
                         <a:rPr lang="en-US" i="1">
                           <a:latin typeface="Cambria Math" panose="02040503050406030204" pitchFamily="18" charset="0"/>
@@ -10777,7 +10757,7 @@
               <a:blipFill>
                 <a:blip r:embed="rId10"/>
                 <a:stretch>
-                  <a:fillRect/>
+                  <a:fillRect t="-4918"/>
                 </a:stretch>
               </a:blipFill>
             </p:spPr>
